--- a/Member5/submission/MAIN_PRESENTATION.pptx
+++ b/Member5/submission/MAIN_PRESENTATION.pptx
@@ -9971,7 +9971,7 @@
       </p:sp>
       <p:sp>
         <p:nvSpPr>
-          <p:cNvPr id="27" name="Text: Same no-delay vulp. Bash monitor times: 1 s, "/>
+          <p:cNvPr id="27" name="Text: Same no-delay vulp. Bash timer: whole seconds"/>
           <p:cNvSpPr txBox="1"/>
           <p:nvPr/>
         </p:nvSpPr>
@@ -10006,7 +10006,7 @@
               </a:defRPr>
             </a:pPr>
             <a:r>
-              <a:t>Same no-delay vulp. Bash monitor times: 1 s, 0 s, 0 s; 0 means sub-second timer resolution.</a:t>
+              <a:t>Same no-delay vulp. Bash timer: whole seconds; a 0 s reading does not mean zero runtime.</a:t>
             </a:r>
           </a:p>
         </p:txBody>
